--- a/coastal-15-open-house.pptx
+++ b/coastal-15-open-house.pptx
@@ -3317,7 +3317,7 @@
         <p:spPr>
           <a:xfrm>
             <a:off x="762000" y="6286500"/>
-            <a:ext cx="2793950" cy="1981200"/>
+            <a:ext cx="2793950" cy="2143125"/>
           </a:xfrm>
           <a:prstGeom prst="rect">
             <a:avLst/>
@@ -3404,7 +3404,7 @@
         </p:nvSpPr>
         <p:spPr>
           <a:xfrm>
-            <a:off x="762000" y="8258175"/>
+            <a:off x="762000" y="8420100"/>
             <a:ext cx="2793950" cy="9525"/>
           </a:xfrm>
           <a:prstGeom prst="rect">
@@ -3449,7 +3449,7 @@
         <p:spPr>
           <a:xfrm>
             <a:off x="762000" y="6286500"/>
-            <a:ext cx="9525" cy="1981200"/>
+            <a:ext cx="9525" cy="2143125"/>
           </a:xfrm>
           <a:prstGeom prst="rect">
             <a:avLst/>
@@ -3493,7 +3493,7 @@
         <p:spPr>
           <a:xfrm>
             <a:off x="3546425" y="6286500"/>
-            <a:ext cx="9525" cy="1981200"/>
+            <a:ext cx="9525" cy="2143125"/>
           </a:xfrm>
           <a:prstGeom prst="rect">
             <a:avLst/>
@@ -3537,7 +3537,7 @@
         <p:spPr>
           <a:xfrm>
             <a:off x="3746450" y="6286500"/>
-            <a:ext cx="2794099" cy="1981200"/>
+            <a:ext cx="2794099" cy="2143125"/>
           </a:xfrm>
           <a:prstGeom prst="rect">
             <a:avLst/>
@@ -3624,7 +3624,7 @@
         </p:nvSpPr>
         <p:spPr>
           <a:xfrm>
-            <a:off x="3746450" y="8258175"/>
+            <a:off x="3746450" y="8420100"/>
             <a:ext cx="2794099" cy="9525"/>
           </a:xfrm>
           <a:prstGeom prst="rect">
@@ -3669,7 +3669,7 @@
         <p:spPr>
           <a:xfrm>
             <a:off x="3746450" y="6286500"/>
-            <a:ext cx="9525" cy="1981200"/>
+            <a:ext cx="9525" cy="2143125"/>
           </a:xfrm>
           <a:prstGeom prst="rect">
             <a:avLst/>
@@ -3713,7 +3713,7 @@
         <p:spPr>
           <a:xfrm>
             <a:off x="6531025" y="6286500"/>
-            <a:ext cx="9525" cy="1981200"/>
+            <a:ext cx="9525" cy="2143125"/>
           </a:xfrm>
           <a:prstGeom prst="rect">
             <a:avLst/>
@@ -3757,7 +3757,7 @@
         <p:spPr>
           <a:xfrm>
             <a:off x="6731050" y="6286500"/>
-            <a:ext cx="2793950" cy="1981200"/>
+            <a:ext cx="2793950" cy="2143125"/>
           </a:xfrm>
           <a:prstGeom prst="rect">
             <a:avLst/>
@@ -3844,7 +3844,7 @@
         </p:nvSpPr>
         <p:spPr>
           <a:xfrm>
-            <a:off x="6731050" y="8258175"/>
+            <a:off x="6731050" y="8420100"/>
             <a:ext cx="2793950" cy="9525"/>
           </a:xfrm>
           <a:prstGeom prst="rect">
@@ -3889,7 +3889,7 @@
         <p:spPr>
           <a:xfrm>
             <a:off x="6731050" y="6286500"/>
-            <a:ext cx="9525" cy="1981200"/>
+            <a:ext cx="9525" cy="2143125"/>
           </a:xfrm>
           <a:prstGeom prst="rect">
             <a:avLst/>
@@ -3933,7 +3933,7 @@
         <p:spPr>
           <a:xfrm>
             <a:off x="9515475" y="6286500"/>
-            <a:ext cx="9525" cy="1981200"/>
+            <a:ext cx="9525" cy="2143125"/>
           </a:xfrm>
           <a:prstGeom prst="rect">
             <a:avLst/>
@@ -4020,8 +4020,8 @@
         </p:nvSpPr>
         <p:spPr>
           <a:xfrm>
-            <a:off x="762000" y="15840075"/>
-            <a:ext cx="2485876" cy="9525"/>
+            <a:off x="762000" y="15621000"/>
+            <a:ext cx="3362027" cy="9525"/>
           </a:xfrm>
           <a:prstGeom prst="rect">
             <a:avLst/>
@@ -4065,7 +4065,7 @@
         <p:spPr>
           <a:xfrm>
             <a:off x="762000" y="16373475"/>
-            <a:ext cx="2485876" cy="9525"/>
+            <a:ext cx="3362027" cy="9525"/>
           </a:xfrm>
           <a:prstGeom prst="rect">
             <a:avLst/>
@@ -4108,8 +4108,8 @@
         </p:nvSpPr>
         <p:spPr>
           <a:xfrm>
-            <a:off x="762000" y="15840075"/>
-            <a:ext cx="9525" cy="542925"/>
+            <a:off x="762000" y="15621000"/>
+            <a:ext cx="9525" cy="762000"/>
           </a:xfrm>
           <a:prstGeom prst="rect">
             <a:avLst/>
@@ -4152,8 +4152,8 @@
         </p:nvSpPr>
         <p:spPr>
           <a:xfrm>
-            <a:off x="3238351" y="15840075"/>
-            <a:ext cx="9525" cy="542925"/>
+            <a:off x="4114502" y="15621000"/>
+            <a:ext cx="9525" cy="762000"/>
           </a:xfrm>
           <a:prstGeom prst="rect">
             <a:avLst/>
@@ -4196,7 +4196,7 @@
         </p:nvSpPr>
         <p:spPr>
           <a:xfrm>
-            <a:off x="1041493" y="16057656"/>
+            <a:off x="1079593" y="15948118"/>
             <a:ext cx="107763" cy="107763"/>
           </a:xfrm>
           <a:prstGeom prst="rect">
@@ -4279,8 +4279,8 @@
         </p:nvSpPr>
         <p:spPr>
           <a:xfrm>
-            <a:off x="7711529" y="938212"/>
-            <a:ext cx="3282553" cy="104775"/>
+            <a:off x="6687443" y="904875"/>
+            <a:ext cx="4921091" cy="171450"/>
           </a:xfrm>
           <a:prstGeom prst="rect">
             <a:avLst/>
@@ -4293,7 +4293,7 @@
           <a:p>
             <a:pPr algn="l"/>
             <a:r>
-              <a:rPr sz="750" i="0" b="1" spc="240">
+              <a:rPr sz="1200" i="0" b="1" spc="360">
                 <a:solidFill>
                   <a:srgbClr val="332C46"/>
                 </a:solidFill>
@@ -4315,7 +4315,7 @@
         <p:spPr>
           <a:xfrm>
             <a:off x="-2057400" y="2286000"/>
-            <a:ext cx="14401800" cy="142875"/>
+            <a:ext cx="14401800" cy="228600"/>
           </a:xfrm>
           <a:prstGeom prst="rect">
             <a:avLst/>
@@ -4328,7 +4328,7 @@
           <a:p>
             <a:pPr algn="ctr"/>
             <a:r>
-              <a:rPr sz="975" i="0" b="1" spc="351">
+              <a:rPr sz="1575" i="0" b="1" spc="472">
                 <a:solidFill>
                   <a:srgbClr val="A98BA6"/>
                 </a:solidFill>
@@ -4349,7 +4349,7 @@
         </p:nvSpPr>
         <p:spPr>
           <a:xfrm>
-            <a:off x="-2057400" y="2619375"/>
+            <a:off x="-2057400" y="2705100"/>
             <a:ext cx="14401800" cy="1209675"/>
           </a:xfrm>
           <a:prstGeom prst="rect">
@@ -4384,7 +4384,7 @@
         </p:nvSpPr>
         <p:spPr>
           <a:xfrm>
-            <a:off x="-99045" y="6581775"/>
+            <a:off x="-99045" y="6619875"/>
             <a:ext cx="4516041" cy="1219200"/>
           </a:xfrm>
           <a:prstGeom prst="rect">
@@ -4423,8 +4423,8 @@
         </p:nvSpPr>
         <p:spPr>
           <a:xfrm>
-            <a:off x="-99045" y="7858125"/>
-            <a:ext cx="4516041" cy="114300"/>
+            <a:off x="-99045" y="7934325"/>
+            <a:ext cx="4516041" cy="161925"/>
           </a:xfrm>
           <a:prstGeom prst="rect">
             <a:avLst/>
@@ -4437,7 +4437,7 @@
           <a:p>
             <a:pPr algn="ctr"/>
             <a:r>
-              <a:rPr sz="825" i="0" b="1" spc="247">
+              <a:rPr sz="1125" i="0" b="1" spc="292">
                 <a:solidFill>
                   <a:srgbClr val="A98BA6"/>
                 </a:solidFill>
@@ -4458,7 +4458,7 @@
         </p:nvSpPr>
         <p:spPr>
           <a:xfrm>
-            <a:off x="2885361" y="6581775"/>
+            <a:off x="2885361" y="6619875"/>
             <a:ext cx="4516279" cy="1219200"/>
           </a:xfrm>
           <a:prstGeom prst="rect">
@@ -4497,8 +4497,8 @@
         </p:nvSpPr>
         <p:spPr>
           <a:xfrm>
-            <a:off x="2885361" y="7858125"/>
-            <a:ext cx="4516279" cy="114300"/>
+            <a:off x="2885361" y="7934325"/>
+            <a:ext cx="4516279" cy="161925"/>
           </a:xfrm>
           <a:prstGeom prst="rect">
             <a:avLst/>
@@ -4511,7 +4511,7 @@
           <a:p>
             <a:pPr algn="ctr"/>
             <a:r>
-              <a:rPr sz="825" i="0" b="1" spc="247">
+              <a:rPr sz="1125" i="0" b="1" spc="292">
                 <a:solidFill>
                   <a:srgbClr val="A98BA6"/>
                 </a:solidFill>
@@ -4532,7 +4532,7 @@
         </p:nvSpPr>
         <p:spPr>
           <a:xfrm>
-            <a:off x="5870004" y="6581775"/>
+            <a:off x="5870004" y="6619875"/>
             <a:ext cx="4516041" cy="1219200"/>
           </a:xfrm>
           <a:prstGeom prst="rect">
@@ -4571,8 +4571,8 @@
         </p:nvSpPr>
         <p:spPr>
           <a:xfrm>
-            <a:off x="5870004" y="7858125"/>
-            <a:ext cx="4516041" cy="114300"/>
+            <a:off x="5870004" y="7934325"/>
+            <a:ext cx="4516041" cy="161925"/>
           </a:xfrm>
           <a:prstGeom prst="rect">
             <a:avLst/>
@@ -4585,7 +4585,7 @@
           <a:p>
             <a:pPr algn="ctr"/>
             <a:r>
-              <a:rPr sz="825" i="0" b="1" spc="247">
+              <a:rPr sz="1125" i="0" b="1" spc="292">
                 <a:solidFill>
                   <a:srgbClr val="A98BA6"/>
                 </a:solidFill>
@@ -4607,7 +4607,7 @@
         <p:spPr>
           <a:xfrm>
             <a:off x="-2057400" y="10620375"/>
-            <a:ext cx="14401800" cy="114300"/>
+            <a:ext cx="14401800" cy="171450"/>
           </a:xfrm>
           <a:prstGeom prst="rect">
             <a:avLst/>
@@ -4620,7 +4620,7 @@
           <a:p>
             <a:pPr algn="ctr"/>
             <a:r>
-              <a:rPr sz="825" i="0" b="1" spc="247">
+              <a:rPr sz="1200" i="0" b="1" spc="312">
                 <a:solidFill>
                   <a:srgbClr val="8A8090"/>
                 </a:solidFill>
@@ -4641,8 +4641,8 @@
         </p:nvSpPr>
         <p:spPr>
           <a:xfrm>
-            <a:off x="-2057400" y="10848975"/>
-            <a:ext cx="14401800" cy="485775"/>
+            <a:off x="-2057400" y="10925175"/>
+            <a:ext cx="14401800" cy="523875"/>
           </a:xfrm>
           <a:prstGeom prst="rect">
             <a:avLst/>
@@ -4655,7 +4655,7 @@
           <a:p>
             <a:pPr algn="ctr"/>
             <a:r>
-              <a:rPr sz="3300" i="1" b="0">
+              <a:rPr sz="3600" i="1" b="0">
                 <a:solidFill>
                   <a:srgbClr val="332C46"/>
                 </a:solidFill>
@@ -4676,8 +4676,8 @@
         </p:nvSpPr>
         <p:spPr>
           <a:xfrm>
-            <a:off x="-2057400" y="11391900"/>
-            <a:ext cx="14401800" cy="171450"/>
+            <a:off x="-2057400" y="11525250"/>
+            <a:ext cx="14401800" cy="209550"/>
           </a:xfrm>
           <a:prstGeom prst="rect">
             <a:avLst/>
@@ -4690,7 +4690,7 @@
           <a:p>
             <a:pPr algn="ctr"/>
             <a:r>
-              <a:rPr sz="1200" i="0" b="0">
+              <a:rPr sz="1425" i="0" b="0">
                 <a:solidFill>
                   <a:srgbClr val="8A8090"/>
                 </a:solidFill>
@@ -4711,7 +4711,7 @@
         </p:nvSpPr>
         <p:spPr>
           <a:xfrm>
-            <a:off x="-2057400" y="11715750"/>
+            <a:off x="-2057400" y="11887200"/>
             <a:ext cx="14401800" cy="304800"/>
           </a:xfrm>
           <a:prstGeom prst="rect">
@@ -4746,8 +4746,8 @@
         </p:nvSpPr>
         <p:spPr>
           <a:xfrm>
-            <a:off x="1266825" y="16035338"/>
-            <a:ext cx="2666762" cy="152400"/>
+            <a:off x="1323975" y="15878175"/>
+            <a:ext cx="3885724" cy="247650"/>
           </a:xfrm>
           <a:prstGeom prst="rect">
             <a:avLst/>
@@ -4760,7 +4760,7 @@
           <a:p>
             <a:pPr algn="l"/>
             <a:r>
-              <a:rPr sz="1050" i="0" b="1" spc="231">
+              <a:rPr sz="1650" i="0" b="1" spc="330">
                 <a:solidFill>
                   <a:srgbClr val="332C46"/>
                 </a:solidFill>
@@ -4781,7 +4781,7 @@
         </p:nvSpPr>
         <p:spPr>
           <a:xfrm>
-            <a:off x="2828776" y="16021050"/>
+            <a:off x="3666827" y="15911512"/>
             <a:ext cx="579120" cy="180975"/>
           </a:xfrm>
           <a:prstGeom prst="rect">
@@ -4816,8 +4816,8 @@
         </p:nvSpPr>
         <p:spPr>
           <a:xfrm>
-            <a:off x="-2057400" y="17306925"/>
-            <a:ext cx="14401800" cy="123825"/>
+            <a:off x="-2057400" y="17249775"/>
+            <a:ext cx="14401800" cy="180975"/>
           </a:xfrm>
           <a:prstGeom prst="rect">
             <a:avLst/>
@@ -4830,7 +4830,7 @@
           <a:p>
             <a:pPr algn="ctr"/>
             <a:r>
-              <a:rPr sz="825" i="0" b="1" spc="264">
+              <a:rPr sz="1200" i="0" b="1" spc="360">
                 <a:solidFill>
                   <a:srgbClr val="332C46"/>
                 </a:solidFill>

--- a/coastal-15-open-house.pptx
+++ b/coastal-15-open-house.pptx
@@ -3317,7 +3317,7 @@
         <p:spPr>
           <a:xfrm>
             <a:off x="762000" y="6286500"/>
-            <a:ext cx="2793950" cy="2143125"/>
+            <a:ext cx="2793950" cy="2209800"/>
           </a:xfrm>
           <a:prstGeom prst="rect">
             <a:avLst/>
@@ -3404,7 +3404,7 @@
         </p:nvSpPr>
         <p:spPr>
           <a:xfrm>
-            <a:off x="762000" y="8420100"/>
+            <a:off x="762000" y="8486775"/>
             <a:ext cx="2793950" cy="9525"/>
           </a:xfrm>
           <a:prstGeom prst="rect">
@@ -3449,7 +3449,7 @@
         <p:spPr>
           <a:xfrm>
             <a:off x="762000" y="6286500"/>
-            <a:ext cx="9525" cy="2143125"/>
+            <a:ext cx="9525" cy="2209800"/>
           </a:xfrm>
           <a:prstGeom prst="rect">
             <a:avLst/>
@@ -3493,7 +3493,7 @@
         <p:spPr>
           <a:xfrm>
             <a:off x="3546425" y="6286500"/>
-            <a:ext cx="9525" cy="2143125"/>
+            <a:ext cx="9525" cy="2209800"/>
           </a:xfrm>
           <a:prstGeom prst="rect">
             <a:avLst/>
@@ -3537,7 +3537,7 @@
         <p:spPr>
           <a:xfrm>
             <a:off x="3746450" y="6286500"/>
-            <a:ext cx="2794099" cy="2143125"/>
+            <a:ext cx="2794099" cy="2209800"/>
           </a:xfrm>
           <a:prstGeom prst="rect">
             <a:avLst/>
@@ -3624,7 +3624,7 @@
         </p:nvSpPr>
         <p:spPr>
           <a:xfrm>
-            <a:off x="3746450" y="8420100"/>
+            <a:off x="3746450" y="8486775"/>
             <a:ext cx="2794099" cy="9525"/>
           </a:xfrm>
           <a:prstGeom prst="rect">
@@ -3669,7 +3669,7 @@
         <p:spPr>
           <a:xfrm>
             <a:off x="3746450" y="6286500"/>
-            <a:ext cx="9525" cy="2143125"/>
+            <a:ext cx="9525" cy="2209800"/>
           </a:xfrm>
           <a:prstGeom prst="rect">
             <a:avLst/>
@@ -3713,7 +3713,7 @@
         <p:spPr>
           <a:xfrm>
             <a:off x="6531025" y="6286500"/>
-            <a:ext cx="9525" cy="2143125"/>
+            <a:ext cx="9525" cy="2209800"/>
           </a:xfrm>
           <a:prstGeom prst="rect">
             <a:avLst/>
@@ -3757,7 +3757,7 @@
         <p:spPr>
           <a:xfrm>
             <a:off x="6731050" y="6286500"/>
-            <a:ext cx="2793950" cy="2143125"/>
+            <a:ext cx="2793950" cy="2209800"/>
           </a:xfrm>
           <a:prstGeom prst="rect">
             <a:avLst/>
@@ -3844,7 +3844,7 @@
         </p:nvSpPr>
         <p:spPr>
           <a:xfrm>
-            <a:off x="6731050" y="8420100"/>
+            <a:off x="6731050" y="8486775"/>
             <a:ext cx="2793950" cy="9525"/>
           </a:xfrm>
           <a:prstGeom prst="rect">
@@ -3889,7 +3889,7 @@
         <p:spPr>
           <a:xfrm>
             <a:off x="6731050" y="6286500"/>
-            <a:ext cx="9525" cy="2143125"/>
+            <a:ext cx="9525" cy="2209800"/>
           </a:xfrm>
           <a:prstGeom prst="rect">
             <a:avLst/>
@@ -3933,7 +3933,7 @@
         <p:spPr>
           <a:xfrm>
             <a:off x="9515475" y="6286500"/>
-            <a:ext cx="9525" cy="2143125"/>
+            <a:ext cx="9525" cy="2209800"/>
           </a:xfrm>
           <a:prstGeom prst="rect">
             <a:avLst/>
@@ -4020,8 +4020,8 @@
         </p:nvSpPr>
         <p:spPr>
           <a:xfrm>
-            <a:off x="762000" y="15621000"/>
-            <a:ext cx="3362027" cy="9525"/>
+            <a:off x="762000" y="15516225"/>
+            <a:ext cx="3964335" cy="9525"/>
           </a:xfrm>
           <a:prstGeom prst="rect">
             <a:avLst/>
@@ -4065,7 +4065,7 @@
         <p:spPr>
           <a:xfrm>
             <a:off x="762000" y="16373475"/>
-            <a:ext cx="3362027" cy="9525"/>
+            <a:ext cx="3964335" cy="9525"/>
           </a:xfrm>
           <a:prstGeom prst="rect">
             <a:avLst/>
@@ -4108,8 +4108,8 @@
         </p:nvSpPr>
         <p:spPr>
           <a:xfrm>
-            <a:off x="762000" y="15621000"/>
-            <a:ext cx="9525" cy="762000"/>
+            <a:off x="762000" y="15516225"/>
+            <a:ext cx="9525" cy="866775"/>
           </a:xfrm>
           <a:prstGeom prst="rect">
             <a:avLst/>
@@ -4152,8 +4152,8 @@
         </p:nvSpPr>
         <p:spPr>
           <a:xfrm>
-            <a:off x="4114502" y="15621000"/>
-            <a:ext cx="9525" cy="762000"/>
+            <a:off x="4716810" y="15516225"/>
+            <a:ext cx="9525" cy="866775"/>
           </a:xfrm>
           <a:prstGeom prst="rect">
             <a:avLst/>
@@ -4196,7 +4196,7 @@
         </p:nvSpPr>
         <p:spPr>
           <a:xfrm>
-            <a:off x="1079593" y="15948118"/>
+            <a:off x="1117693" y="15895731"/>
             <a:ext cx="107763" cy="107763"/>
           </a:xfrm>
           <a:prstGeom prst="rect">
@@ -4279,8 +4279,8 @@
         </p:nvSpPr>
         <p:spPr>
           <a:xfrm>
-            <a:off x="6687443" y="904875"/>
-            <a:ext cx="4921091" cy="171450"/>
+            <a:off x="6307485" y="885825"/>
+            <a:ext cx="5529024" cy="209550"/>
           </a:xfrm>
           <a:prstGeom prst="rect">
             <a:avLst/>
@@ -4293,7 +4293,7 @@
           <a:p>
             <a:pPr algn="l"/>
             <a:r>
-              <a:rPr sz="1200" i="0" b="1" spc="360">
+              <a:rPr sz="1425" i="0" b="1" spc="370">
                 <a:solidFill>
                   <a:srgbClr val="332C46"/>
                 </a:solidFill>
@@ -4315,7 +4315,7 @@
         <p:spPr>
           <a:xfrm>
             <a:off x="-2057400" y="2286000"/>
-            <a:ext cx="14401800" cy="228600"/>
+            <a:ext cx="14401800" cy="247650"/>
           </a:xfrm>
           <a:prstGeom prst="rect">
             <a:avLst/>
@@ -4328,7 +4328,7 @@
           <a:p>
             <a:pPr algn="ctr"/>
             <a:r>
-              <a:rPr sz="1575" i="0" b="1" spc="472">
+              <a:rPr sz="1650" i="0" b="1" spc="462">
                 <a:solidFill>
                   <a:srgbClr val="A98BA6"/>
                 </a:solidFill>
@@ -4349,7 +4349,7 @@
         </p:nvSpPr>
         <p:spPr>
           <a:xfrm>
-            <a:off x="-2057400" y="2705100"/>
+            <a:off x="-2057400" y="2724150"/>
             <a:ext cx="14401800" cy="1209675"/>
           </a:xfrm>
           <a:prstGeom prst="rect">
@@ -4423,8 +4423,8 @@
         </p:nvSpPr>
         <p:spPr>
           <a:xfrm>
-            <a:off x="-99045" y="7934325"/>
-            <a:ext cx="4516041" cy="161925"/>
+            <a:off x="-99045" y="7953375"/>
+            <a:ext cx="4516041" cy="209550"/>
           </a:xfrm>
           <a:prstGeom prst="rect">
             <a:avLst/>
@@ -4437,7 +4437,7 @@
           <a:p>
             <a:pPr algn="ctr"/>
             <a:r>
-              <a:rPr sz="1125" i="0" b="1" spc="292">
+              <a:rPr sz="1425" i="0" b="1" spc="313">
                 <a:solidFill>
                   <a:srgbClr val="A98BA6"/>
                 </a:solidFill>
@@ -4497,8 +4497,8 @@
         </p:nvSpPr>
         <p:spPr>
           <a:xfrm>
-            <a:off x="2885361" y="7934325"/>
-            <a:ext cx="4516279" cy="161925"/>
+            <a:off x="2885361" y="7953375"/>
+            <a:ext cx="4516279" cy="209550"/>
           </a:xfrm>
           <a:prstGeom prst="rect">
             <a:avLst/>
@@ -4511,7 +4511,7 @@
           <a:p>
             <a:pPr algn="ctr"/>
             <a:r>
-              <a:rPr sz="1125" i="0" b="1" spc="292">
+              <a:rPr sz="1425" i="0" b="1" spc="313">
                 <a:solidFill>
                   <a:srgbClr val="A98BA6"/>
                 </a:solidFill>
@@ -4571,8 +4571,8 @@
         </p:nvSpPr>
         <p:spPr>
           <a:xfrm>
-            <a:off x="5870004" y="7934325"/>
-            <a:ext cx="4516041" cy="161925"/>
+            <a:off x="5870004" y="7953375"/>
+            <a:ext cx="4516041" cy="209550"/>
           </a:xfrm>
           <a:prstGeom prst="rect">
             <a:avLst/>
@@ -4585,7 +4585,7 @@
           <a:p>
             <a:pPr algn="ctr"/>
             <a:r>
-              <a:rPr sz="1125" i="0" b="1" spc="292">
+              <a:rPr sz="1425" i="0" b="1" spc="313">
                 <a:solidFill>
                   <a:srgbClr val="A98BA6"/>
                 </a:solidFill>
@@ -4607,7 +4607,7 @@
         <p:spPr>
           <a:xfrm>
             <a:off x="-2057400" y="10620375"/>
-            <a:ext cx="14401800" cy="171450"/>
+            <a:ext cx="14401800" cy="209550"/>
           </a:xfrm>
           <a:prstGeom prst="rect">
             <a:avLst/>
@@ -4620,7 +4620,7 @@
           <a:p>
             <a:pPr algn="ctr"/>
             <a:r>
-              <a:rPr sz="1200" i="0" b="1" spc="312">
+              <a:rPr sz="1425" i="0" b="1" spc="313">
                 <a:solidFill>
                   <a:srgbClr val="8A8090"/>
                 </a:solidFill>
@@ -4641,7 +4641,7 @@
         </p:nvSpPr>
         <p:spPr>
           <a:xfrm>
-            <a:off x="-2057400" y="10925175"/>
+            <a:off x="-2057400" y="10963275"/>
             <a:ext cx="14401800" cy="523875"/>
           </a:xfrm>
           <a:prstGeom prst="rect">
@@ -4676,7 +4676,7 @@
         </p:nvSpPr>
         <p:spPr>
           <a:xfrm>
-            <a:off x="-2057400" y="11525250"/>
+            <a:off x="-2057400" y="11563350"/>
             <a:ext cx="14401800" cy="209550"/>
           </a:xfrm>
           <a:prstGeom prst="rect">
@@ -4711,7 +4711,7 @@
         </p:nvSpPr>
         <p:spPr>
           <a:xfrm>
-            <a:off x="-2057400" y="11887200"/>
+            <a:off x="-2057400" y="11925300"/>
             <a:ext cx="14401800" cy="304800"/>
           </a:xfrm>
           <a:prstGeom prst="rect">
@@ -4746,8 +4746,8 @@
         </p:nvSpPr>
         <p:spPr>
           <a:xfrm>
-            <a:off x="1323975" y="15878175"/>
-            <a:ext cx="3885724" cy="247650"/>
+            <a:off x="1362075" y="15801975"/>
+            <a:ext cx="4575096" cy="295275"/>
           </a:xfrm>
           <a:prstGeom prst="rect">
             <a:avLst/>
@@ -4760,7 +4760,7 @@
           <a:p>
             <a:pPr algn="l"/>
             <a:r>
-              <a:rPr sz="1650" i="0" b="1" spc="330">
+              <a:rPr sz="2025" i="0" b="1" spc="364">
                 <a:solidFill>
                   <a:srgbClr val="332C46"/>
                 </a:solidFill>
@@ -4781,8 +4781,8 @@
         </p:nvSpPr>
         <p:spPr>
           <a:xfrm>
-            <a:off x="3666827" y="15911512"/>
-            <a:ext cx="579120" cy="180975"/>
+            <a:off x="4135785" y="15792450"/>
+            <a:ext cx="731520" cy="314325"/>
           </a:xfrm>
           <a:prstGeom prst="rect">
             <a:avLst/>
@@ -4795,7 +4795,7 @@
           <a:p>
             <a:pPr algn="l"/>
             <a:r>
-              <a:rPr sz="1200" i="0" b="0">
+              <a:rPr sz="2100" i="0" b="0">
                 <a:solidFill>
                   <a:srgbClr val="A98BA6"/>
                 </a:solidFill>
@@ -4816,8 +4816,8 @@
         </p:nvSpPr>
         <p:spPr>
           <a:xfrm>
-            <a:off x="-2057400" y="17249775"/>
-            <a:ext cx="14401800" cy="180975"/>
+            <a:off x="-2057400" y="17211675"/>
+            <a:ext cx="14401800" cy="219075"/>
           </a:xfrm>
           <a:prstGeom prst="rect">
             <a:avLst/>
@@ -4830,7 +4830,7 @@
           <a:p>
             <a:pPr algn="ctr"/>
             <a:r>
-              <a:rPr sz="1200" i="0" b="1" spc="360">
+              <a:rPr sz="1425" i="0" b="1" spc="370">
                 <a:solidFill>
                   <a:srgbClr val="332C46"/>
                 </a:solidFill>
